--- a/ARUTHRA-20231CSE0748-ppt.pptx
+++ b/ARUTHRA-20231CSE0748-ppt.pptx
@@ -1502,7 +1502,7 @@
               <a:buNone/>
             </a:pPr>
             <a:r>
-              <a:rPr lang="en-US" sz="2800" b="1" dirty="0">
+              <a:rPr lang="en-US" sz="2800" b="1" dirty="0" err="1">
                 <a:solidFill>
                   <a:srgbClr val="FFFFFF"/>
                 </a:solidFill>
@@ -1510,7 +1510,7 @@
                 <a:ea typeface="Trebuchet MS" pitchFamily="34" charset="-122"/>
                 <a:cs typeface="Trebuchet MS" pitchFamily="34" charset="-120"/>
               </a:rPr>
-              <a:t>OrganicRec</a:t>
+              <a:t>OrganicPicks</a:t>
             </a:r>
             <a:endParaRPr lang="en-US" sz="2800" dirty="0"/>
           </a:p>
@@ -1588,24 +1588,7 @@
                 <a:ea typeface="Trebuchet MS" pitchFamily="34" charset="-122"/>
                 <a:cs typeface="Trebuchet MS" pitchFamily="34" charset="-120"/>
               </a:rPr>
-              <a:t>Organic Product</a:t>
-            </a:r>
-            <a:endParaRPr lang="en-US" sz="3000" dirty="0"/>
-          </a:p>
-          <a:p>
-            <a:pPr marL="0" indent="0" algn="ctr">
-              <a:buNone/>
-            </a:pPr>
-            <a:r>
-              <a:rPr lang="en-US" sz="3000" b="1" dirty="0">
-                <a:solidFill>
-                  <a:srgbClr val="E2E8F0"/>
-                </a:solidFill>
-                <a:latin typeface="Trebuchet MS" pitchFamily="34" charset="0"/>
-                <a:ea typeface="Trebuchet MS" pitchFamily="34" charset="-122"/>
-                <a:cs typeface="Trebuchet MS" pitchFamily="34" charset="-120"/>
-              </a:rPr>
-              <a:t>Recommendation System</a:t>
+              <a:t>Organic E-Commerce Website</a:t>
             </a:r>
             <a:endParaRPr lang="en-US" sz="3000" dirty="0"/>
           </a:p>

--- a/ARUTHRA-20231CSE0748-ppt.pptx
+++ b/ARUTHRA-20231CSE0748-ppt.pptx
@@ -273,6 +273,13 @@
           </p:nvPr>
         </p:nvSpPr>
         <p:spPr/>
+        <p:txBody>
+          <a:bodyPr/>
+          <a:lstStyle/>
+          <a:p>
+            <a:endParaRPr lang="en-US"/>
+          </a:p>
+        </p:txBody>
       </p:sp>
       <p:sp>
         <p:nvSpPr>
@@ -357,6 +364,13 @@
           </p:nvPr>
         </p:nvSpPr>
         <p:spPr/>
+        <p:txBody>
+          <a:bodyPr/>
+          <a:lstStyle/>
+          <a:p>
+            <a:endParaRPr lang="en-US"/>
+          </a:p>
+        </p:txBody>
       </p:sp>
       <p:sp>
         <p:nvSpPr>
@@ -441,6 +455,13 @@
           </p:nvPr>
         </p:nvSpPr>
         <p:spPr/>
+        <p:txBody>
+          <a:bodyPr/>
+          <a:lstStyle/>
+          <a:p>
+            <a:endParaRPr lang="en-US"/>
+          </a:p>
+        </p:txBody>
       </p:sp>
       <p:sp>
         <p:nvSpPr>
@@ -525,6 +546,13 @@
           </p:nvPr>
         </p:nvSpPr>
         <p:spPr/>
+        <p:txBody>
+          <a:bodyPr/>
+          <a:lstStyle/>
+          <a:p>
+            <a:endParaRPr lang="en-US"/>
+          </a:p>
+        </p:txBody>
       </p:sp>
       <p:sp>
         <p:nvSpPr>
@@ -609,6 +637,13 @@
           </p:nvPr>
         </p:nvSpPr>
         <p:spPr/>
+        <p:txBody>
+          <a:bodyPr/>
+          <a:lstStyle/>
+          <a:p>
+            <a:endParaRPr lang="en-US"/>
+          </a:p>
+        </p:txBody>
       </p:sp>
       <p:sp>
         <p:nvSpPr>
@@ -693,6 +728,13 @@
           </p:nvPr>
         </p:nvSpPr>
         <p:spPr/>
+        <p:txBody>
+          <a:bodyPr/>
+          <a:lstStyle/>
+          <a:p>
+            <a:endParaRPr lang="en-US"/>
+          </a:p>
+        </p:txBody>
       </p:sp>
       <p:sp>
         <p:nvSpPr>
@@ -777,6 +819,13 @@
           </p:nvPr>
         </p:nvSpPr>
         <p:spPr/>
+        <p:txBody>
+          <a:bodyPr/>
+          <a:lstStyle/>
+          <a:p>
+            <a:endParaRPr lang="en-US"/>
+          </a:p>
+        </p:txBody>
       </p:sp>
       <p:sp>
         <p:nvSpPr>
@@ -861,6 +910,13 @@
           </p:nvPr>
         </p:nvSpPr>
         <p:spPr/>
+        <p:txBody>
+          <a:bodyPr/>
+          <a:lstStyle/>
+          <a:p>
+            <a:endParaRPr lang="en-US"/>
+          </a:p>
+        </p:txBody>
       </p:sp>
       <p:sp>
         <p:nvSpPr>
@@ -945,6 +1001,13 @@
           </p:nvPr>
         </p:nvSpPr>
         <p:spPr/>
+        <p:txBody>
+          <a:bodyPr/>
+          <a:lstStyle/>
+          <a:p>
+            <a:endParaRPr lang="en-US"/>
+          </a:p>
+        </p:txBody>
       </p:sp>
       <p:sp>
         <p:nvSpPr>
@@ -1502,7 +1565,7 @@
               <a:buNone/>
             </a:pPr>
             <a:r>
-              <a:rPr lang="en-US" sz="2800" b="1" dirty="0" err="1">
+              <a:rPr lang="en-US" sz="2800" b="1" dirty="0">
                 <a:solidFill>
                   <a:srgbClr val="FFFFFF"/>
                 </a:solidFill>
@@ -2202,7 +2265,7 @@
                 <a:ea typeface="Trebuchet MS" pitchFamily="34" charset="-122"/>
                 <a:cs typeface="Trebuchet MS" pitchFamily="34" charset="-120"/>
               </a:rPr>
-              <a:t>What is OrganicRec?</a:t>
+              <a:t>What is OrganicPicks?</a:t>
             </a:r>
             <a:endParaRPr lang="en-US" sz="1400" dirty="0"/>
           </a:p>
@@ -2241,7 +2304,7 @@
                 <a:ea typeface="Trebuchet MS" pitchFamily="34" charset="-122"/>
                 <a:cs typeface="Trebuchet MS" pitchFamily="34" charset="-120"/>
               </a:rPr>
-              <a:t>OrganicRec is a fully frontend, single-page organic grocery marketplace built with HTML, CSS (Tailwind) and vanilla JavaScript.</a:t>
+              <a:t>OrganicPicks is a fully frontend, single-page organic grocery marketplace built with HTML, CSS (Tailwind) and vanilla JavaScript.</a:t>
             </a:r>
             <a:endParaRPr lang="en-US" sz="1250" dirty="0"/>
           </a:p>
